--- a/2TERMO/Linguagem_Marcacao/Aula07/SmartCoffee_AltaFidelidade.pptx
+++ b/2TERMO/Linguagem_Marcacao/Aula07/SmartCoffee_AltaFidelidade.pptx
@@ -107,19 +107,40 @@
       </a:defRPr>
     </a:lvl9pPr>
   </p:defaultTextStyle>
+  <p:extLst>
+    <p:ext uri="{EFAFB233-063F-42B5-8137-9DF3F51BA10A}">
+      <p15:sldGuideLst xmlns:p15="http://schemas.microsoft.com/office/powerpoint/2012/main"/>
+    </p:ext>
+  </p:extLst>
 </p:presentation>
-</file>
-
-<file path=ppt/revisionInfo.xml><?xml version="1.0" encoding="utf-8"?>
-<p1510:revInfo xmlns:a="http://schemas.openxmlformats.org/drawingml/2006/main" xmlns:r="http://schemas.openxmlformats.org/officeDocument/2006/relationships" xmlns:p1510="http://schemas.microsoft.com/office/powerpoint/2015/10/main">
-  <p1510:revLst>
-    <p1510:client id="{11510523-7DFE-4B98-B75F-6997756CF12E}" v="6" dt="2026-09-18T19:55:37.307"/>
-  </p1510:revLst>
-</p1510:revInfo>
 </file>
 
 <file path=ppt/changesInfos/changesInfo1.xml><?xml version="1.0" encoding="utf-8"?>
 <pc:chgInfo xmlns:a="http://schemas.openxmlformats.org/drawingml/2006/main" xmlns:r="http://schemas.openxmlformats.org/officeDocument/2006/relationships" xmlns:ac="http://schemas.microsoft.com/office/drawing/2013/main/command" xmlns:pc="http://schemas.microsoft.com/office/powerpoint/2013/main/command">
+  <pc:docChgLst>
+    <pc:chgData name="OTAVIO CORREIA" userId="cbcf311e-5dd6-48ec-b17a-f8cfd3a0fc31" providerId="ADAL" clId="{72FF2FEE-AC72-4E66-8DDA-6D5601733DD5}"/>
+    <pc:docChg chg="modSld">
+      <pc:chgData name="OTAVIO CORREIA" userId="cbcf311e-5dd6-48ec-b17a-f8cfd3a0fc31" providerId="ADAL" clId="{72FF2FEE-AC72-4E66-8DDA-6D5601733DD5}" dt="2026-09-25T19:11:48.831" v="6" actId="207"/>
+      <pc:docMkLst>
+        <pc:docMk/>
+      </pc:docMkLst>
+      <pc:sldChg chg="addSp modSp mod">
+        <pc:chgData name="OTAVIO CORREIA" userId="cbcf311e-5dd6-48ec-b17a-f8cfd3a0fc31" providerId="ADAL" clId="{72FF2FEE-AC72-4E66-8DDA-6D5601733DD5}" dt="2026-09-25T19:11:48.831" v="6" actId="207"/>
+        <pc:sldMkLst>
+          <pc:docMk/>
+          <pc:sldMk cId="1962022500" sldId="256"/>
+        </pc:sldMkLst>
+        <pc:spChg chg="add mod">
+          <ac:chgData name="OTAVIO CORREIA" userId="cbcf311e-5dd6-48ec-b17a-f8cfd3a0fc31" providerId="ADAL" clId="{72FF2FEE-AC72-4E66-8DDA-6D5601733DD5}" dt="2026-09-25T19:11:48.831" v="6" actId="207"/>
+          <ac:spMkLst>
+            <pc:docMk/>
+            <pc:sldMk cId="1962022500" sldId="256"/>
+            <ac:spMk id="2" creationId="{923E9FDB-4CCF-42DD-057C-C88B56162CD5}"/>
+          </ac:spMkLst>
+        </pc:spChg>
+      </pc:sldChg>
+    </pc:docChg>
+  </pc:docChgLst>
   <pc:docChgLst>
     <pc:chgData name="OTAVIO CORREIA" userId="cbcf311e-5dd6-48ec-b17a-f8cfd3a0fc31" providerId="ADAL" clId="{7B8D77C2-7D75-47E4-9B7B-92411C611FAE}"/>
     <pc:docChg chg="undo custSel modSld">
@@ -141,68 +162,12 @@
             <ac:spMk id="36" creationId="{90FCE1F0-89C6-9C9B-A787-ADC5C529095C}"/>
           </ac:spMkLst>
         </pc:spChg>
-        <pc:spChg chg="del">
-          <ac:chgData name="OTAVIO CORREIA" userId="cbcf311e-5dd6-48ec-b17a-f8cfd3a0fc31" providerId="ADAL" clId="{7B8D77C2-7D75-47E4-9B7B-92411C611FAE}" dt="2026-09-18T19:47:14.587" v="650" actId="478"/>
-          <ac:spMkLst>
-            <pc:docMk/>
-            <pc:sldMk cId="1962022500" sldId="256"/>
-            <ac:spMk id="37" creationId="{CF47AB05-1182-0379-67A2-39FF42AA770A}"/>
-          </ac:spMkLst>
-        </pc:spChg>
-        <pc:spChg chg="del">
-          <ac:chgData name="OTAVIO CORREIA" userId="cbcf311e-5dd6-48ec-b17a-f8cfd3a0fc31" providerId="ADAL" clId="{7B8D77C2-7D75-47E4-9B7B-92411C611FAE}" dt="2026-09-18T19:47:15.462" v="651" actId="478"/>
-          <ac:spMkLst>
-            <pc:docMk/>
-            <pc:sldMk cId="1962022500" sldId="256"/>
-            <ac:spMk id="38" creationId="{D6C44B76-19E5-3EAE-6574-B552A9F22B21}"/>
-          </ac:spMkLst>
-        </pc:spChg>
         <pc:spChg chg="mod">
           <ac:chgData name="OTAVIO CORREIA" userId="cbcf311e-5dd6-48ec-b17a-f8cfd3a0fc31" providerId="ADAL" clId="{7B8D77C2-7D75-47E4-9B7B-92411C611FAE}" dt="2026-09-18T19:50:00.143" v="734" actId="255"/>
           <ac:spMkLst>
             <pc:docMk/>
             <pc:sldMk cId="1962022500" sldId="256"/>
             <ac:spMk id="39" creationId="{2499277F-9B08-C046-66E9-21049941CD33}"/>
-          </ac:spMkLst>
-        </pc:spChg>
-        <pc:spChg chg="del mod">
-          <ac:chgData name="OTAVIO CORREIA" userId="cbcf311e-5dd6-48ec-b17a-f8cfd3a0fc31" providerId="ADAL" clId="{7B8D77C2-7D75-47E4-9B7B-92411C611FAE}" dt="2026-09-18T19:51:02.633" v="808" actId="478"/>
-          <ac:spMkLst>
-            <pc:docMk/>
-            <pc:sldMk cId="1962022500" sldId="256"/>
-            <ac:spMk id="46" creationId="{9E15047A-66A5-46F6-CF17-7FF289BE5538}"/>
-          </ac:spMkLst>
-        </pc:spChg>
-        <pc:spChg chg="del mod">
-          <ac:chgData name="OTAVIO CORREIA" userId="cbcf311e-5dd6-48ec-b17a-f8cfd3a0fc31" providerId="ADAL" clId="{7B8D77C2-7D75-47E4-9B7B-92411C611FAE}" dt="2026-09-18T19:55:33.063" v="1062" actId="478"/>
-          <ac:spMkLst>
-            <pc:docMk/>
-            <pc:sldMk cId="1962022500" sldId="256"/>
-            <ac:spMk id="47" creationId="{2B3184B5-0790-CD62-9BAC-885F5EB09D92}"/>
-          </ac:spMkLst>
-        </pc:spChg>
-        <pc:spChg chg="del mod">
-          <ac:chgData name="OTAVIO CORREIA" userId="cbcf311e-5dd6-48ec-b17a-f8cfd3a0fc31" providerId="ADAL" clId="{7B8D77C2-7D75-47E4-9B7B-92411C611FAE}" dt="2026-09-18T19:55:33.685" v="1063" actId="478"/>
-          <ac:spMkLst>
-            <pc:docMk/>
-            <pc:sldMk cId="1962022500" sldId="256"/>
-            <ac:spMk id="48" creationId="{D092B7DC-C82D-21EA-EC70-41748DE2A5A0}"/>
-          </ac:spMkLst>
-        </pc:spChg>
-        <pc:spChg chg="del mod">
-          <ac:chgData name="OTAVIO CORREIA" userId="cbcf311e-5dd6-48ec-b17a-f8cfd3a0fc31" providerId="ADAL" clId="{7B8D77C2-7D75-47E4-9B7B-92411C611FAE}" dt="2026-09-18T19:55:34.295" v="1064" actId="478"/>
-          <ac:spMkLst>
-            <pc:docMk/>
-            <pc:sldMk cId="1962022500" sldId="256"/>
-            <ac:spMk id="49" creationId="{0875B0FF-2192-4DDC-F5F3-A3E41D5B12B5}"/>
-          </ac:spMkLst>
-        </pc:spChg>
-        <pc:spChg chg="del mod">
-          <ac:chgData name="OTAVIO CORREIA" userId="cbcf311e-5dd6-48ec-b17a-f8cfd3a0fc31" providerId="ADAL" clId="{7B8D77C2-7D75-47E4-9B7B-92411C611FAE}" dt="2026-09-18T19:55:34.800" v="1065" actId="478"/>
-          <ac:spMkLst>
-            <pc:docMk/>
-            <pc:sldMk cId="1962022500" sldId="256"/>
-            <ac:spMk id="50" creationId="{E07ECDC0-C411-FAB9-991C-A926C38E2081}"/>
           </ac:spMkLst>
         </pc:spChg>
         <pc:spChg chg="add del mod">
@@ -219,14 +184,6 @@
             <pc:docMk/>
             <pc:sldMk cId="1962022500" sldId="256"/>
             <ac:spMk id="114" creationId="{7FFDF5BC-9DAE-1FA3-405B-D996ABABE4E0}"/>
-          </ac:spMkLst>
-        </pc:spChg>
-        <pc:spChg chg="del">
-          <ac:chgData name="OTAVIO CORREIA" userId="cbcf311e-5dd6-48ec-b17a-f8cfd3a0fc31" providerId="ADAL" clId="{7B8D77C2-7D75-47E4-9B7B-92411C611FAE}" dt="2026-09-18T19:19:56.932" v="9" actId="478"/>
-          <ac:spMkLst>
-            <pc:docMk/>
-            <pc:sldMk cId="1962022500" sldId="256"/>
-            <ac:spMk id="116" creationId="{89D815FE-4B8E-6E2A-F2CD-0120748F08D3}"/>
           </ac:spMkLst>
         </pc:spChg>
         <pc:spChg chg="mod">
@@ -251,14 +208,6 @@
             <pc:docMk/>
             <pc:sldMk cId="1962022500" sldId="256"/>
             <ac:spMk id="213" creationId="{F2117521-8BD8-3511-996A-708121071FE4}"/>
-          </ac:spMkLst>
-        </pc:spChg>
-        <pc:spChg chg="add del mod ord">
-          <ac:chgData name="OTAVIO CORREIA" userId="cbcf311e-5dd6-48ec-b17a-f8cfd3a0fc31" providerId="ADAL" clId="{7B8D77C2-7D75-47E4-9B7B-92411C611FAE}" dt="2026-09-18T19:21:00.183" v="18" actId="478"/>
-          <ac:spMkLst>
-            <pc:docMk/>
-            <pc:sldMk cId="1962022500" sldId="256"/>
-            <ac:spMk id="247" creationId="{90B16D36-E02C-CACF-7D6B-1D99598022B7}"/>
           </ac:spMkLst>
         </pc:spChg>
         <pc:spChg chg="add mod ord">
@@ -333,22 +282,6 @@
             <ac:spMk id="263" creationId="{3EEBDA81-4D59-9B0A-2629-8A43DD664953}"/>
           </ac:spMkLst>
         </pc:spChg>
-        <pc:spChg chg="add del mod">
-          <ac:chgData name="OTAVIO CORREIA" userId="cbcf311e-5dd6-48ec-b17a-f8cfd3a0fc31" providerId="ADAL" clId="{7B8D77C2-7D75-47E4-9B7B-92411C611FAE}" dt="2026-09-18T19:48:01.988" v="668" actId="478"/>
-          <ac:spMkLst>
-            <pc:docMk/>
-            <pc:sldMk cId="1962022500" sldId="256"/>
-            <ac:spMk id="266" creationId="{00855EF2-8B7E-196F-327B-1AA3963DB041}"/>
-          </ac:spMkLst>
-        </pc:spChg>
-        <pc:spChg chg="add del mod">
-          <ac:chgData name="OTAVIO CORREIA" userId="cbcf311e-5dd6-48ec-b17a-f8cfd3a0fc31" providerId="ADAL" clId="{7B8D77C2-7D75-47E4-9B7B-92411C611FAE}" dt="2026-09-18T19:48:08.765" v="671" actId="478"/>
-          <ac:spMkLst>
-            <pc:docMk/>
-            <pc:sldMk cId="1962022500" sldId="256"/>
-            <ac:spMk id="268" creationId="{1A258F21-77CF-9B3A-77CC-6C782BF9832C}"/>
-          </ac:spMkLst>
-        </pc:spChg>
         <pc:spChg chg="add mod">
           <ac:chgData name="OTAVIO CORREIA" userId="cbcf311e-5dd6-48ec-b17a-f8cfd3a0fc31" providerId="ADAL" clId="{7B8D77C2-7D75-47E4-9B7B-92411C611FAE}" dt="2026-09-18T19:48:58.121" v="710" actId="255"/>
           <ac:spMkLst>
@@ -371,14 +304,6 @@
             <pc:docMk/>
             <pc:sldMk cId="1962022500" sldId="256"/>
             <ac:spMk id="274" creationId="{79E3A137-949B-AA4F-3712-59DD42E990F3}"/>
-          </ac:spMkLst>
-        </pc:spChg>
-        <pc:spChg chg="add del">
-          <ac:chgData name="OTAVIO CORREIA" userId="cbcf311e-5dd6-48ec-b17a-f8cfd3a0fc31" providerId="ADAL" clId="{7B8D77C2-7D75-47E4-9B7B-92411C611FAE}" dt="2026-09-18T19:51:10.841" v="810" actId="22"/>
-          <ac:spMkLst>
-            <pc:docMk/>
-            <pc:sldMk cId="1962022500" sldId="256"/>
-            <ac:spMk id="276" creationId="{FB86EFB5-CE2A-0068-B14E-35DE6E3981CE}"/>
           </ac:spMkLst>
         </pc:spChg>
         <pc:spChg chg="add mod">
@@ -501,14 +426,6 @@
             <ac:spMk id="302" creationId="{5F8E80FF-8B41-0AA3-87E0-093BC6AE2835}"/>
           </ac:spMkLst>
         </pc:spChg>
-        <pc:grpChg chg="del">
-          <ac:chgData name="OTAVIO CORREIA" userId="cbcf311e-5dd6-48ec-b17a-f8cfd3a0fc31" providerId="ADAL" clId="{7B8D77C2-7D75-47E4-9B7B-92411C611FAE}" dt="2026-09-18T19:43:32.863" v="527" actId="478"/>
-          <ac:grpSpMkLst>
-            <pc:docMk/>
-            <pc:sldMk cId="1962022500" sldId="256"/>
-            <ac:grpSpMk id="210" creationId="{BFA679B8-64DB-AAD9-5AFA-72CA931D2911}"/>
-          </ac:grpSpMkLst>
-        </pc:grpChg>
         <pc:grpChg chg="mod">
           <ac:chgData name="OTAVIO CORREIA" userId="cbcf311e-5dd6-48ec-b17a-f8cfd3a0fc31" providerId="ADAL" clId="{7B8D77C2-7D75-47E4-9B7B-92411C611FAE}" dt="2026-09-18T19:45:30.833" v="640" actId="1076"/>
           <ac:grpSpMkLst>
@@ -525,22 +442,6 @@
             <ac:grpSpMk id="254" creationId="{3E75C945-9A6A-0C5E-3C1C-174404EE2937}"/>
           </ac:grpSpMkLst>
         </pc:grpChg>
-        <pc:grpChg chg="add del mod">
-          <ac:chgData name="OTAVIO CORREIA" userId="cbcf311e-5dd6-48ec-b17a-f8cfd3a0fc31" providerId="ADAL" clId="{7B8D77C2-7D75-47E4-9B7B-92411C611FAE}" dt="2026-09-18T19:45:47.004" v="642" actId="165"/>
-          <ac:grpSpMkLst>
-            <pc:docMk/>
-            <pc:sldMk cId="1962022500" sldId="256"/>
-            <ac:grpSpMk id="261" creationId="{4E6C4536-272A-4C95-4D99-B35F3CB43385}"/>
-          </ac:grpSpMkLst>
-        </pc:grpChg>
-        <pc:grpChg chg="add del mod">
-          <ac:chgData name="OTAVIO CORREIA" userId="cbcf311e-5dd6-48ec-b17a-f8cfd3a0fc31" providerId="ADAL" clId="{7B8D77C2-7D75-47E4-9B7B-92411C611FAE}" dt="2026-09-18T19:46:41.274" v="647" actId="165"/>
-          <ac:grpSpMkLst>
-            <pc:docMk/>
-            <pc:sldMk cId="1962022500" sldId="256"/>
-            <ac:grpSpMk id="264" creationId="{BC962C0D-949E-84C6-C02C-F2006DBC1CD6}"/>
-          </ac:grpSpMkLst>
-        </pc:grpChg>
         <pc:grpChg chg="add mod">
           <ac:chgData name="OTAVIO CORREIA" userId="cbcf311e-5dd6-48ec-b17a-f8cfd3a0fc31" providerId="ADAL" clId="{7B8D77C2-7D75-47E4-9B7B-92411C611FAE}" dt="2026-09-18T19:55:48.819" v="1067" actId="1076"/>
           <ac:grpSpMkLst>
@@ -549,118 +450,6 @@
             <ac:grpSpMk id="300" creationId="{FC628B21-021F-29FE-9F70-A631E35A3D64}"/>
           </ac:grpSpMkLst>
         </pc:grpChg>
-        <pc:picChg chg="add del mod">
-          <ac:chgData name="OTAVIO CORREIA" userId="cbcf311e-5dd6-48ec-b17a-f8cfd3a0fc31" providerId="ADAL" clId="{7B8D77C2-7D75-47E4-9B7B-92411C611FAE}" dt="2026-09-18T19:52:44.498" v="855" actId="478"/>
-          <ac:picMkLst>
-            <pc:docMk/>
-            <pc:sldMk cId="1962022500" sldId="256"/>
-            <ac:picMk id="282" creationId="{50B586EC-2F75-7998-D8B1-1A26726784BE}"/>
-          </ac:picMkLst>
-        </pc:picChg>
-        <pc:cxnChg chg="del">
-          <ac:chgData name="OTAVIO CORREIA" userId="cbcf311e-5dd6-48ec-b17a-f8cfd3a0fc31" providerId="ADAL" clId="{7B8D77C2-7D75-47E4-9B7B-92411C611FAE}" dt="2026-09-18T19:38:54.637" v="305" actId="478"/>
-          <ac:cxnSpMkLst>
-            <pc:docMk/>
-            <pc:sldMk cId="1962022500" sldId="256"/>
-            <ac:cxnSpMk id="51" creationId="{39DF6368-5ED3-6CC4-617A-40D94EF488E3}"/>
-          </ac:cxnSpMkLst>
-        </pc:cxnChg>
-        <pc:cxnChg chg="del">
-          <ac:chgData name="OTAVIO CORREIA" userId="cbcf311e-5dd6-48ec-b17a-f8cfd3a0fc31" providerId="ADAL" clId="{7B8D77C2-7D75-47E4-9B7B-92411C611FAE}" dt="2026-09-18T19:39:23.941" v="348" actId="478"/>
-          <ac:cxnSpMkLst>
-            <pc:docMk/>
-            <pc:sldMk cId="1962022500" sldId="256"/>
-            <ac:cxnSpMk id="52" creationId="{C028691F-E989-6D10-19E7-521431BA2CD0}"/>
-          </ac:cxnSpMkLst>
-        </pc:cxnChg>
-        <pc:cxnChg chg="del">
-          <ac:chgData name="OTAVIO CORREIA" userId="cbcf311e-5dd6-48ec-b17a-f8cfd3a0fc31" providerId="ADAL" clId="{7B8D77C2-7D75-47E4-9B7B-92411C611FAE}" dt="2026-09-18T19:39:36.039" v="352" actId="478"/>
-          <ac:cxnSpMkLst>
-            <pc:docMk/>
-            <pc:sldMk cId="1962022500" sldId="256"/>
-            <ac:cxnSpMk id="53" creationId="{ED6F5589-AED2-934A-EB0D-B1B2FEB4F98E}"/>
-          </ac:cxnSpMkLst>
-        </pc:cxnChg>
-        <pc:cxnChg chg="del">
-          <ac:chgData name="OTAVIO CORREIA" userId="cbcf311e-5dd6-48ec-b17a-f8cfd3a0fc31" providerId="ADAL" clId="{7B8D77C2-7D75-47E4-9B7B-92411C611FAE}" dt="2026-09-18T19:39:35.021" v="351" actId="478"/>
-          <ac:cxnSpMkLst>
-            <pc:docMk/>
-            <pc:sldMk cId="1962022500" sldId="256"/>
-            <ac:cxnSpMk id="54" creationId="{C92B5E72-1548-7F07-AF7C-619DB895F6D6}"/>
-          </ac:cxnSpMkLst>
-        </pc:cxnChg>
-        <pc:cxnChg chg="del">
-          <ac:chgData name="OTAVIO CORREIA" userId="cbcf311e-5dd6-48ec-b17a-f8cfd3a0fc31" providerId="ADAL" clId="{7B8D77C2-7D75-47E4-9B7B-92411C611FAE}" dt="2026-09-18T19:50:10.757" v="735" actId="478"/>
-          <ac:cxnSpMkLst>
-            <pc:docMk/>
-            <pc:sldMk cId="1962022500" sldId="256"/>
-            <ac:cxnSpMk id="55" creationId="{9473FFA4-A062-6683-6835-80AC92073974}"/>
-          </ac:cxnSpMkLst>
-        </pc:cxnChg>
-        <pc:cxnChg chg="del">
-          <ac:chgData name="OTAVIO CORREIA" userId="cbcf311e-5dd6-48ec-b17a-f8cfd3a0fc31" providerId="ADAL" clId="{7B8D77C2-7D75-47E4-9B7B-92411C611FAE}" dt="2026-09-18T19:50:12.732" v="736" actId="478"/>
-          <ac:cxnSpMkLst>
-            <pc:docMk/>
-            <pc:sldMk cId="1962022500" sldId="256"/>
-            <ac:cxnSpMk id="56" creationId="{BE78E562-6784-19F3-17F1-38FFEEABAE79}"/>
-          </ac:cxnSpMkLst>
-        </pc:cxnChg>
-        <pc:cxnChg chg="del">
-          <ac:chgData name="OTAVIO CORREIA" userId="cbcf311e-5dd6-48ec-b17a-f8cfd3a0fc31" providerId="ADAL" clId="{7B8D77C2-7D75-47E4-9B7B-92411C611FAE}" dt="2026-09-18T19:50:14.453" v="737" actId="478"/>
-          <ac:cxnSpMkLst>
-            <pc:docMk/>
-            <pc:sldMk cId="1962022500" sldId="256"/>
-            <ac:cxnSpMk id="57" creationId="{3F1972C7-AAE8-0E23-F2AB-3A86363FF6AC}"/>
-          </ac:cxnSpMkLst>
-        </pc:cxnChg>
-        <pc:cxnChg chg="del">
-          <ac:chgData name="OTAVIO CORREIA" userId="cbcf311e-5dd6-48ec-b17a-f8cfd3a0fc31" providerId="ADAL" clId="{7B8D77C2-7D75-47E4-9B7B-92411C611FAE}" dt="2026-09-18T19:50:16.449" v="738" actId="478"/>
-          <ac:cxnSpMkLst>
-            <pc:docMk/>
-            <pc:sldMk cId="1962022500" sldId="256"/>
-            <ac:cxnSpMk id="58" creationId="{6AE68686-0004-FD00-7AEA-58BF54162B8D}"/>
-          </ac:cxnSpMkLst>
-        </pc:cxnChg>
-        <pc:cxnChg chg="del">
-          <ac:chgData name="OTAVIO CORREIA" userId="cbcf311e-5dd6-48ec-b17a-f8cfd3a0fc31" providerId="ADAL" clId="{7B8D77C2-7D75-47E4-9B7B-92411C611FAE}" dt="2026-09-18T19:43:50.863" v="529" actId="478"/>
-          <ac:cxnSpMkLst>
-            <pc:docMk/>
-            <pc:sldMk cId="1962022500" sldId="256"/>
-            <ac:cxnSpMk id="59" creationId="{3F6F0614-7138-99DE-8679-D7190851CEA1}"/>
-          </ac:cxnSpMkLst>
-        </pc:cxnChg>
-        <pc:cxnChg chg="del">
-          <ac:chgData name="OTAVIO CORREIA" userId="cbcf311e-5dd6-48ec-b17a-f8cfd3a0fc31" providerId="ADAL" clId="{7B8D77C2-7D75-47E4-9B7B-92411C611FAE}" dt="2026-09-18T19:43:47.104" v="528" actId="478"/>
-          <ac:cxnSpMkLst>
-            <pc:docMk/>
-            <pc:sldMk cId="1962022500" sldId="256"/>
-            <ac:cxnSpMk id="60" creationId="{2C0CB634-2A4D-5855-AA34-4B3548A9ED51}"/>
-          </ac:cxnSpMkLst>
-        </pc:cxnChg>
-        <pc:cxnChg chg="del">
-          <ac:chgData name="OTAVIO CORREIA" userId="cbcf311e-5dd6-48ec-b17a-f8cfd3a0fc31" providerId="ADAL" clId="{7B8D77C2-7D75-47E4-9B7B-92411C611FAE}" dt="2026-09-18T19:43:53.868" v="530" actId="478"/>
-          <ac:cxnSpMkLst>
-            <pc:docMk/>
-            <pc:sldMk cId="1962022500" sldId="256"/>
-            <ac:cxnSpMk id="61" creationId="{1A4AD316-0F4C-257D-E1B1-EC4C687114AB}"/>
-          </ac:cxnSpMkLst>
-        </pc:cxnChg>
-        <pc:cxnChg chg="del">
-          <ac:chgData name="OTAVIO CORREIA" userId="cbcf311e-5dd6-48ec-b17a-f8cfd3a0fc31" providerId="ADAL" clId="{7B8D77C2-7D75-47E4-9B7B-92411C611FAE}" dt="2026-09-18T19:49:24.567" v="713" actId="478"/>
-          <ac:cxnSpMkLst>
-            <pc:docMk/>
-            <pc:sldMk cId="1962022500" sldId="256"/>
-            <ac:cxnSpMk id="79" creationId="{2C6C0BFD-F052-5195-68DC-3219020E90C3}"/>
-          </ac:cxnSpMkLst>
-        </pc:cxnChg>
-        <pc:cxnChg chg="del mod">
-          <ac:chgData name="OTAVIO CORREIA" userId="cbcf311e-5dd6-48ec-b17a-f8cfd3a0fc31" providerId="ADAL" clId="{7B8D77C2-7D75-47E4-9B7B-92411C611FAE}" dt="2026-09-18T19:23:00.498" v="137" actId="478"/>
-          <ac:cxnSpMkLst>
-            <pc:docMk/>
-            <pc:sldMk cId="1962022500" sldId="256"/>
-            <ac:cxnSpMk id="197" creationId="{28687942-467A-99D6-F62B-1C5BF85F50CF}"/>
-          </ac:cxnSpMkLst>
-        </pc:cxnChg>
       </pc:sldChg>
     </pc:docChg>
   </pc:docChgLst>
@@ -749,7 +538,7 @@
           <a:p>
             <a:fld id="{091A68DF-6B61-4217-B6E0-72E487F6A2AF}" type="datetimeFigureOut">
               <a:rPr lang="pt-BR" smtClean="0"/>
-              <a:t>18/09/2026</a:t>
+              <a:t>25/09/2026</a:t>
             </a:fld>
             <a:endParaRPr lang="pt-BR"/>
           </a:p>
@@ -1231,7 +1020,7 @@
           <a:p>
             <a:fld id="{75807891-CAF0-4C24-9ECE-AE15AFA117F1}" type="datetimeFigureOut">
               <a:rPr lang="pt-BR" smtClean="0"/>
-              <a:t>18/09/2026</a:t>
+              <a:t>25/09/2026</a:t>
             </a:fld>
             <a:endParaRPr lang="pt-BR"/>
           </a:p>
@@ -1401,7 +1190,7 @@
           <a:p>
             <a:fld id="{75807891-CAF0-4C24-9ECE-AE15AFA117F1}" type="datetimeFigureOut">
               <a:rPr lang="pt-BR" smtClean="0"/>
-              <a:t>18/09/2026</a:t>
+              <a:t>25/09/2026</a:t>
             </a:fld>
             <a:endParaRPr lang="pt-BR"/>
           </a:p>
@@ -1581,7 +1370,7 @@
           <a:p>
             <a:fld id="{75807891-CAF0-4C24-9ECE-AE15AFA117F1}" type="datetimeFigureOut">
               <a:rPr lang="pt-BR" smtClean="0"/>
-              <a:t>18/09/2026</a:t>
+              <a:t>25/09/2026</a:t>
             </a:fld>
             <a:endParaRPr lang="pt-BR"/>
           </a:p>
@@ -1751,7 +1540,7 @@
           <a:p>
             <a:fld id="{75807891-CAF0-4C24-9ECE-AE15AFA117F1}" type="datetimeFigureOut">
               <a:rPr lang="pt-BR" smtClean="0"/>
-              <a:t>18/09/2026</a:t>
+              <a:t>25/09/2026</a:t>
             </a:fld>
             <a:endParaRPr lang="pt-BR"/>
           </a:p>
@@ -1997,7 +1786,7 @@
           <a:p>
             <a:fld id="{75807891-CAF0-4C24-9ECE-AE15AFA117F1}" type="datetimeFigureOut">
               <a:rPr lang="pt-BR" smtClean="0"/>
-              <a:t>18/09/2026</a:t>
+              <a:t>25/09/2026</a:t>
             </a:fld>
             <a:endParaRPr lang="pt-BR"/>
           </a:p>
@@ -2229,7 +2018,7 @@
           <a:p>
             <a:fld id="{75807891-CAF0-4C24-9ECE-AE15AFA117F1}" type="datetimeFigureOut">
               <a:rPr lang="pt-BR" smtClean="0"/>
-              <a:t>18/09/2026</a:t>
+              <a:t>25/09/2026</a:t>
             </a:fld>
             <a:endParaRPr lang="pt-BR"/>
           </a:p>
@@ -2596,7 +2385,7 @@
           <a:p>
             <a:fld id="{75807891-CAF0-4C24-9ECE-AE15AFA117F1}" type="datetimeFigureOut">
               <a:rPr lang="pt-BR" smtClean="0"/>
-              <a:t>18/09/2026</a:t>
+              <a:t>25/09/2026</a:t>
             </a:fld>
             <a:endParaRPr lang="pt-BR"/>
           </a:p>
@@ -2714,7 +2503,7 @@
           <a:p>
             <a:fld id="{75807891-CAF0-4C24-9ECE-AE15AFA117F1}" type="datetimeFigureOut">
               <a:rPr lang="pt-BR" smtClean="0"/>
-              <a:t>18/09/2026</a:t>
+              <a:t>25/09/2026</a:t>
             </a:fld>
             <a:endParaRPr lang="pt-BR"/>
           </a:p>
@@ -2809,7 +2598,7 @@
           <a:p>
             <a:fld id="{75807891-CAF0-4C24-9ECE-AE15AFA117F1}" type="datetimeFigureOut">
               <a:rPr lang="pt-BR" smtClean="0"/>
-              <a:t>18/09/2026</a:t>
+              <a:t>25/09/2026</a:t>
             </a:fld>
             <a:endParaRPr lang="pt-BR"/>
           </a:p>
@@ -3086,7 +2875,7 @@
           <a:p>
             <a:fld id="{75807891-CAF0-4C24-9ECE-AE15AFA117F1}" type="datetimeFigureOut">
               <a:rPr lang="pt-BR" smtClean="0"/>
-              <a:t>18/09/2026</a:t>
+              <a:t>25/09/2026</a:t>
             </a:fld>
             <a:endParaRPr lang="pt-BR"/>
           </a:p>
@@ -3343,7 +3132,7 @@
           <a:p>
             <a:fld id="{75807891-CAF0-4C24-9ECE-AE15AFA117F1}" type="datetimeFigureOut">
               <a:rPr lang="pt-BR" smtClean="0"/>
-              <a:t>18/09/2026</a:t>
+              <a:t>25/09/2026</a:t>
             </a:fld>
             <a:endParaRPr lang="pt-BR"/>
           </a:p>
@@ -3556,7 +3345,7 @@
           <a:p>
             <a:fld id="{75807891-CAF0-4C24-9ECE-AE15AFA117F1}" type="datetimeFigureOut">
               <a:rPr lang="pt-BR" smtClean="0"/>
-              <a:t>18/09/2026</a:t>
+              <a:t>25/09/2026</a:t>
             </a:fld>
             <a:endParaRPr lang="pt-BR"/>
           </a:p>
@@ -8346,6 +8135,55 @@
           </p:txBody>
         </p:sp>
       </p:grpSp>
+      <p:sp>
+        <p:nvSpPr>
+          <p:cNvPr id="2" name="Retângulo 1">
+            <a:extLst>
+              <a:ext uri="{FF2B5EF4-FFF2-40B4-BE49-F238E27FC236}">
+                <a16:creationId xmlns:a16="http://schemas.microsoft.com/office/drawing/2014/main" id="{923E9FDB-4CCF-42DD-057C-C88B56162CD5}"/>
+              </a:ext>
+            </a:extLst>
+          </p:cNvPr>
+          <p:cNvSpPr/>
+          <p:nvPr/>
+        </p:nvSpPr>
+        <p:spPr>
+          <a:xfrm>
+            <a:off x="-485861" y="4104906"/>
+            <a:ext cx="352825" cy="797473"/>
+          </a:xfrm>
+          <a:prstGeom prst="rect">
+            <a:avLst/>
+          </a:prstGeom>
+          <a:solidFill>
+            <a:srgbClr val="82684D"/>
+          </a:solidFill>
+        </p:spPr>
+        <p:style>
+          <a:lnRef idx="2">
+            <a:schemeClr val="accent1">
+              <a:shade val="15000"/>
+            </a:schemeClr>
+          </a:lnRef>
+          <a:fillRef idx="1">
+            <a:schemeClr val="accent1"/>
+          </a:fillRef>
+          <a:effectRef idx="0">
+            <a:schemeClr val="accent1"/>
+          </a:effectRef>
+          <a:fontRef idx="minor">
+            <a:schemeClr val="lt1"/>
+          </a:fontRef>
+        </p:style>
+        <p:txBody>
+          <a:bodyPr rtlCol="0" anchor="ctr"/>
+          <a:lstStyle/>
+          <a:p>
+            <a:pPr algn="ctr"/>
+            <a:endParaRPr lang="pt-BR" dirty="0"/>
+          </a:p>
+        </p:txBody>
+      </p:sp>
     </p:spTree>
     <p:extLst>
       <p:ext uri="{BB962C8B-B14F-4D97-AF65-F5344CB8AC3E}">
